--- a/catalog/editorial/templates/ed_cards_grid_2.pptx
+++ b/catalog/editorial/templates/ed_cards_grid_2.pptx
@@ -3577,7 +3577,7 @@
           <a:noFill/>
         </p:spPr>
         <p:txBody>
-          <a:bodyPr wrap="square" lIns="18288" rIns="18288" tIns="13716" bIns="13716">
+          <a:bodyPr wrap="square" anchor="t" lIns="18288" rIns="18288" tIns="13716" bIns="13716">
             <a:noAutofit/>
           </a:bodyPr>
           <a:lstStyle/>
@@ -3632,7 +3632,7 @@
           <a:noFill/>
         </p:spPr>
         <p:txBody>
-          <a:bodyPr wrap="square" lIns="18288" rIns="18288" tIns="13716" bIns="13716">
+          <a:bodyPr wrap="square" anchor="t" lIns="18288" rIns="18288" tIns="13716" bIns="13716">
             <a:noAutofit/>
           </a:bodyPr>
           <a:lstStyle/>
@@ -3687,7 +3687,7 @@
           <a:noFill/>
         </p:spPr>
         <p:txBody>
-          <a:bodyPr wrap="square" lIns="18288" rIns="18288" tIns="13716" bIns="13716">
+          <a:bodyPr wrap="square" anchor="t" lIns="18288" rIns="18288" tIns="13716" bIns="13716">
             <a:noAutofit/>
           </a:bodyPr>
           <a:lstStyle/>
@@ -3786,7 +3786,7 @@
           <a:noFill/>
         </p:spPr>
         <p:txBody>
-          <a:bodyPr wrap="square" lIns="18288" rIns="18288" tIns="13716" bIns="13716">
+          <a:bodyPr wrap="square" anchor="t" lIns="18288" rIns="18288" tIns="13716" bIns="13716">
             <a:noAutofit/>
           </a:bodyPr>
           <a:lstStyle/>
@@ -3841,7 +3841,7 @@
           <a:noFill/>
         </p:spPr>
         <p:txBody>
-          <a:bodyPr wrap="square" lIns="18288" rIns="18288" tIns="13716" bIns="13716">
+          <a:bodyPr wrap="square" anchor="t" lIns="18288" rIns="18288" tIns="13716" bIns="13716">
             <a:noAutofit/>
           </a:bodyPr>
           <a:lstStyle/>
@@ -3986,7 +3986,7 @@
           <a:noFill/>
         </p:spPr>
         <p:txBody>
-          <a:bodyPr wrap="square" lIns="18288" rIns="18288" tIns="13716" bIns="13716">
+          <a:bodyPr wrap="square" anchor="t" lIns="18288" rIns="18288" tIns="13716" bIns="13716">
             <a:noAutofit/>
           </a:bodyPr>
           <a:lstStyle/>
@@ -4041,7 +4041,7 @@
           <a:noFill/>
         </p:spPr>
         <p:txBody>
-          <a:bodyPr wrap="square" lIns="18288" rIns="18288" tIns="13716" bIns="13716">
+          <a:bodyPr wrap="square" anchor="t" lIns="18288" rIns="18288" tIns="13716" bIns="13716">
             <a:noAutofit/>
           </a:bodyPr>
           <a:lstStyle/>
@@ -4096,7 +4096,7 @@
           <a:noFill/>
         </p:spPr>
         <p:txBody>
-          <a:bodyPr wrap="square" lIns="18288" rIns="18288" tIns="13716" bIns="13716">
+          <a:bodyPr wrap="square" anchor="t" lIns="18288" rIns="18288" tIns="13716" bIns="13716">
             <a:noAutofit/>
           </a:bodyPr>
           <a:lstStyle/>
@@ -4241,7 +4241,7 @@
           <a:noFill/>
         </p:spPr>
         <p:txBody>
-          <a:bodyPr wrap="square" lIns="18288" rIns="18288" tIns="13716" bIns="13716">
+          <a:bodyPr wrap="square" anchor="t" lIns="18288" rIns="18288" tIns="13716" bIns="13716">
             <a:noAutofit/>
           </a:bodyPr>
           <a:lstStyle/>
@@ -4296,7 +4296,7 @@
           <a:noFill/>
         </p:spPr>
         <p:txBody>
-          <a:bodyPr wrap="square" lIns="18288" rIns="18288" tIns="13716" bIns="13716">
+          <a:bodyPr wrap="square" anchor="t" lIns="18288" rIns="18288" tIns="13716" bIns="13716">
             <a:noAutofit/>
           </a:bodyPr>
           <a:lstStyle/>
@@ -4351,7 +4351,7 @@
           <a:noFill/>
         </p:spPr>
         <p:txBody>
-          <a:bodyPr wrap="square" lIns="18288" rIns="18288" tIns="13716" bIns="13716">
+          <a:bodyPr wrap="square" anchor="t" lIns="18288" rIns="18288" tIns="13716" bIns="13716">
             <a:noAutofit/>
           </a:bodyPr>
           <a:lstStyle/>
